--- a/presentations/sreday-austin-2026-deck-arcade.pptx
+++ b/presentations/sreday-austin-2026-deck-arcade.pptx
@@ -44498,8 +44498,8 @@
         </p:nvSpPr>
         <p:spPr>
           <a:xfrm>
-            <a:off x="274320" y="2121408"/>
-            <a:ext cx="8595360" cy="384048"/>
+            <a:off x="1695297" y="2100131"/>
+            <a:ext cx="7472477" cy="384048"/>
           </a:xfrm>
           <a:prstGeom prst="rect">
             <a:avLst/>
@@ -46385,6 +46385,126 @@
           </a:p>
         </p:txBody>
       </p:sp>
+      <p:sp>
+        <p:nvSpPr>
+          <p:cNvPr id="1025" name="AutoShape 6">
+            <a:extLst>
+              <a:ext uri="{FF2B5EF4-FFF2-40B4-BE49-F238E27FC236}">
+                <a16:creationId xmlns:a16="http://schemas.microsoft.com/office/drawing/2014/main" id="{AED13A96-51A0-3455-5ED9-2D4DBE1372F4}"/>
+              </a:ext>
+            </a:extLst>
+          </p:cNvPr>
+          <p:cNvSpPr>
+            <a:spLocks noChangeAspect="1" noChangeArrowheads="1"/>
+          </p:cNvSpPr>
+          <p:nvPr/>
+        </p:nvSpPr>
+        <p:spPr bwMode="auto">
+          <a:xfrm>
+            <a:off x="4419600" y="2419350"/>
+            <a:ext cx="304800" cy="304800"/>
+          </a:xfrm>
+          <a:prstGeom prst="rect">
+            <a:avLst/>
+          </a:prstGeom>
+          <a:noFill/>
+          <a:extLst>
+            <a:ext uri="{909E8E84-426E-40DD-AFC4-6F175D3DCCD1}">
+              <a14:hiddenFill xmlns:a14="http://schemas.microsoft.com/office/drawing/2010/main">
+                <a:solidFill>
+                  <a:srgbClr val="FFFFFF"/>
+                </a:solidFill>
+              </a14:hiddenFill>
+            </a:ext>
+          </a:extLst>
+        </p:spPr>
+        <p:txBody>
+          <a:bodyPr vert="horz" wrap="square" lIns="91440" tIns="45720" rIns="91440" bIns="45720" numCol="1" anchor="t" anchorCtr="0" compatLnSpc="1">
+            <a:prstTxWarp prst="textNoShape">
+              <a:avLst/>
+            </a:prstTxWarp>
+          </a:bodyPr>
+          <a:lstStyle/>
+          <a:p>
+            <a:endParaRPr lang="en-US"/>
+          </a:p>
+        </p:txBody>
+      </p:sp>
+      <p:sp>
+        <p:nvSpPr>
+          <p:cNvPr id="1027" name="AutoShape 8">
+            <a:extLst>
+              <a:ext uri="{FF2B5EF4-FFF2-40B4-BE49-F238E27FC236}">
+                <a16:creationId xmlns:a16="http://schemas.microsoft.com/office/drawing/2014/main" id="{583D1565-223F-D039-2D0E-5A6D5C7344FF}"/>
+              </a:ext>
+            </a:extLst>
+          </p:cNvPr>
+          <p:cNvSpPr>
+            <a:spLocks noChangeAspect="1" noChangeArrowheads="1"/>
+          </p:cNvSpPr>
+          <p:nvPr/>
+        </p:nvSpPr>
+        <p:spPr bwMode="auto">
+          <a:xfrm>
+            <a:off x="2256739" y="256489"/>
+            <a:ext cx="2620061" cy="2620061"/>
+          </a:xfrm>
+          <a:prstGeom prst="rect">
+            <a:avLst/>
+          </a:prstGeom>
+          <a:noFill/>
+          <a:extLst>
+            <a:ext uri="{909E8E84-426E-40DD-AFC4-6F175D3DCCD1}">
+              <a14:hiddenFill xmlns:a14="http://schemas.microsoft.com/office/drawing/2010/main">
+                <a:solidFill>
+                  <a:srgbClr val="FFFFFF"/>
+                </a:solidFill>
+              </a14:hiddenFill>
+            </a:ext>
+          </a:extLst>
+        </p:spPr>
+        <p:txBody>
+          <a:bodyPr vert="horz" wrap="square" lIns="91440" tIns="45720" rIns="91440" bIns="45720" numCol="1" anchor="t" anchorCtr="0" compatLnSpc="1">
+            <a:prstTxWarp prst="textNoShape">
+              <a:avLst/>
+            </a:prstTxWarp>
+          </a:bodyPr>
+          <a:lstStyle/>
+          <a:p>
+            <a:endParaRPr lang="en-US"/>
+          </a:p>
+        </p:txBody>
+      </p:sp>
+      <p:pic>
+        <p:nvPicPr>
+          <p:cNvPr id="1029" name="Picture 1028">
+            <a:extLst>
+              <a:ext uri="{FF2B5EF4-FFF2-40B4-BE49-F238E27FC236}">
+                <a16:creationId xmlns:a16="http://schemas.microsoft.com/office/drawing/2014/main" id="{E1708BD6-4691-3A4F-00F9-3355C189A9FE}"/>
+              </a:ext>
+            </a:extLst>
+          </p:cNvPr>
+          <p:cNvPicPr>
+            <a:picLocks noChangeAspect="1"/>
+          </p:cNvPicPr>
+          <p:nvPr/>
+        </p:nvPicPr>
+        <p:blipFill>
+          <a:blip r:embed="rId3"/>
+          <a:stretch>
+            <a:fillRect/>
+          </a:stretch>
+        </p:blipFill>
+        <p:spPr>
+          <a:xfrm>
+            <a:off x="109728" y="1474653"/>
+            <a:ext cx="1994417" cy="1988820"/>
+          </a:xfrm>
+          <a:prstGeom prst="rect">
+            <a:avLst/>
+          </a:prstGeom>
+        </p:spPr>
+      </p:pic>
     </p:spTree>
   </p:cSld>
   <p:clrMapOvr>

--- a/presentations/sreday-austin-2026-deck-arcade.pptx
+++ b/presentations/sreday-austin-2026-deck-arcade.pptx
@@ -5,7 +5,7 @@
     <p:sldMasterId id="2147483648" r:id="rId1"/>
   </p:sldMasterIdLst>
   <p:notesMasterIdLst>
-    <p:notesMasterId r:id="rId23"/>
+    <p:notesMasterId r:id="rId22"/>
   </p:notesMasterIdLst>
   <p:sldIdLst>
     <p:sldId id="256" r:id="rId2"/>
@@ -28,7 +28,6 @@
     <p:sldId id="274" r:id="rId19"/>
     <p:sldId id="275" r:id="rId20"/>
     <p:sldId id="276" r:id="rId21"/>
-    <p:sldId id="277" r:id="rId22"/>
   </p:sldIdLst>
   <p:sldSz cx="9144000" cy="5143500" type="screen16x9"/>
   <p:notesSz cx="5143500" cy="9144000"/>
@@ -1349,90 +1348,6 @@
 </p:notes>
 </file>
 
-<file path=ppt/notesSlides/notesSlide21.xml><?xml version="1.0" encoding="utf-8"?>
-<p:notes xmlns:a="http://schemas.openxmlformats.org/drawingml/2006/main" xmlns:r="http://schemas.openxmlformats.org/officeDocument/2006/relationships" xmlns:p="http://schemas.openxmlformats.org/presentationml/2006/main">
-  <p:cSld>
-    <p:spTree>
-      <p:nvGrpSpPr>
-        <p:cNvPr id="1" name=""/>
-        <p:cNvGrpSpPr/>
-        <p:nvPr/>
-      </p:nvGrpSpPr>
-      <p:grpSpPr>
-        <a:xfrm>
-          <a:off x="0" y="0"/>
-          <a:ext cx="0" cy="0"/>
-          <a:chOff x="0" y="0"/>
-          <a:chExt cx="0" cy="0"/>
-        </a:xfrm>
-      </p:grpSpPr>
-      <p:sp>
-        <p:nvSpPr>
-          <p:cNvPr id="2" name="Slide Image Placeholder 1"/>
-          <p:cNvSpPr>
-            <a:spLocks noGrp="1" noRot="1" noChangeAspect="1"/>
-          </p:cNvSpPr>
-          <p:nvPr>
-            <p:ph type="sldImg"/>
-          </p:nvPr>
-        </p:nvSpPr>
-        <p:spPr/>
-      </p:sp>
-      <p:sp>
-        <p:nvSpPr>
-          <p:cNvPr id="3" name="Notes Placeholder 2"/>
-          <p:cNvSpPr>
-            <a:spLocks noGrp="1"/>
-          </p:cNvSpPr>
-          <p:nvPr>
-            <p:ph type="body" idx="1"/>
-          </p:nvPr>
-        </p:nvSpPr>
-        <p:spPr/>
-        <p:txBody>
-          <a:bodyPr/>
-          <a:lstStyle/>
-          <a:p>
-            <a:endParaRPr lang="en-US" dirty="0"/>
-          </a:p>
-        </p:txBody>
-      </p:sp>
-      <p:sp>
-        <p:nvSpPr>
-          <p:cNvPr id="4" name="Slide Number Placeholder 3"/>
-          <p:cNvSpPr>
-            <a:spLocks noGrp="1"/>
-          </p:cNvSpPr>
-          <p:nvPr>
-            <p:ph type="sldNum" sz="quarter" idx="10"/>
-          </p:nvPr>
-        </p:nvSpPr>
-        <p:spPr/>
-        <p:txBody>
-          <a:bodyPr/>
-          <a:lstStyle/>
-          <a:p>
-            <a:fld id="{F7021451-1387-4CA6-816F-3879F97B5CBC}" type="slidenum">
-              <a:rPr lang="en-US"/>
-              <a:t>21</a:t>
-            </a:fld>
-            <a:endParaRPr lang="en-US"/>
-          </a:p>
-        </p:txBody>
-      </p:sp>
-    </p:spTree>
-    <p:extLst>
-      <p:ext uri="{BB962C8B-B14F-4D97-AF65-F5344CB8AC3E}">
-        <p14:creationId xmlns:p14="http://schemas.microsoft.com/office/powerpoint/2010/main" val="1024086991"/>
-      </p:ext>
-    </p:extLst>
-  </p:cSld>
-  <p:clrMapOvr>
-    <a:masterClrMapping/>
-  </p:clrMapOvr>
-</p:notes>
-</file>
-
 <file path=ppt/notesSlides/notesSlide3.xml><?xml version="1.0" encoding="utf-8"?>
 <p:notes xmlns:a="http://schemas.openxmlformats.org/drawingml/2006/main" xmlns:r="http://schemas.openxmlformats.org/officeDocument/2006/relationships" xmlns:p="http://schemas.openxmlformats.org/presentationml/2006/main">
   <p:cSld>
@@ -17587,7 +17502,7 @@
         </p:nvSpPr>
         <p:spPr>
           <a:xfrm>
-            <a:off x="274320" y="292608"/>
+            <a:off x="269924" y="292608"/>
             <a:ext cx="8595360" cy="457200"/>
           </a:xfrm>
           <a:prstGeom prst="rect">
@@ -17612,7 +17527,7 @@
                 <a:ea typeface="Courier New" pitchFamily="34" charset="-122"/>
                 <a:cs typeface="Courier New" pitchFamily="34" charset="-120"/>
               </a:rPr>
-              <a:t>&gt; THE AGENTIC ACTION PIPELINE</a:t>
+              <a:t>&gt; SECURITY GUARDRAILS TO CONSIDER</a:t>
             </a:r>
             <a:endParaRPr lang="en-US" sz="2800" dirty="0"/>
           </a:p>
@@ -29166,7 +29081,7 @@
                 <a:ea typeface="Courier New" pitchFamily="34" charset="-122"/>
                 <a:cs typeface="Courier New" pitchFamily="34" charset="-120"/>
               </a:rPr>
-              <a:t>DON'T USE PROBABILISTIC AI</a:t>
+              <a:t>DON'T USE PROBABILISTIC AI (ALONE)</a:t>
             </a:r>
             <a:endParaRPr lang="en-US" sz="2600" dirty="0"/>
           </a:p>
@@ -31992,7 +31907,7 @@
                 <a:ea typeface="Courier New" pitchFamily="34" charset="-122"/>
                 <a:cs typeface="Courier New" pitchFamily="34" charset="-120"/>
               </a:rPr>
-              <a:t>CLUSTER-LEVEL</a:t>
+              <a:t>CONTEXT-AWARE</a:t>
             </a:r>
             <a:endParaRPr lang="en-US" sz="1050" dirty="0"/>
           </a:p>
@@ -32465,10 +32380,9 @@
                   <a:srgbClr val="E8E8FF"/>
                 </a:solidFill>
                 <a:latin typeface="Courier New" pitchFamily="34" charset="0"/>
-                <a:ea typeface="Courier New" pitchFamily="34" charset="-122"/>
                 <a:cs typeface="Courier New" pitchFamily="34" charset="-120"/>
               </a:rPr>
-              <a:t>IAC BEHIND</a:t>
+              <a:t>ARTIFACTS are in</a:t>
             </a:r>
             <a:endParaRPr lang="en-US" sz="1050" dirty="0"/>
           </a:p>
@@ -32944,7 +32858,7 @@
                 <a:ea typeface="Courier New" pitchFamily="34" charset="-122"/>
                 <a:cs typeface="Courier New" pitchFamily="34" charset="-120"/>
               </a:rPr>
-              <a:t>AUDIT THE MCP</a:t>
+              <a:t>AUDIT your </a:t>
             </a:r>
             <a:endParaRPr lang="en-US" sz="1050" dirty="0"/>
           </a:p>
@@ -34825,7 +34739,7 @@
                 <a:ea typeface="Courier New" pitchFamily="34" charset="-122"/>
                 <a:cs typeface="Courier New" pitchFamily="34" charset="-120"/>
               </a:rPr>
-              <a:t>RUN AI IN PROD? REDUCE IDENTITY. REDUCE SCOPE.</a:t>
+              <a:t>RUN AI IN PROD? REDUCE SCOPE TO ONLY WHAT IS NEEDED.</a:t>
             </a:r>
             <a:endParaRPr lang="en-US" sz="1200" dirty="0"/>
           </a:p>
@@ -36954,7 +36868,7 @@
                 <a:ea typeface="Courier New" pitchFamily="34" charset="-122"/>
                 <a:cs typeface="Courier New" pitchFamily="34" charset="-120"/>
               </a:rPr>
-              <a:t>WASM and containers are useful but breakable. Docker Desktop 0-days dropped Apr 6-7, 2025.</a:t>
+              <a:t>WASM and containers are useful but breakable. Docker Desktop added Micro-VMs to their system in April.</a:t>
             </a:r>
             <a:endParaRPr lang="en-US" sz="1000" dirty="0"/>
           </a:p>
@@ -46513,1498 +46427,6 @@
 </p:sld>
 </file>
 
-<file path=ppt/slides/slide21.xml><?xml version="1.0" encoding="utf-8"?>
-<p:sld xmlns:a="http://schemas.openxmlformats.org/drawingml/2006/main" xmlns:r="http://schemas.openxmlformats.org/officeDocument/2006/relationships" xmlns:p="http://schemas.openxmlformats.org/presentationml/2006/main">
-  <p:cSld name="Slide 22">
-    <p:bg>
-      <p:bgPr>
-        <a:solidFill>
-          <a:srgbClr val="080808"/>
-        </a:solidFill>
-        <a:effectLst/>
-      </p:bgPr>
-    </p:bg>
-    <p:spTree>
-      <p:nvGrpSpPr>
-        <p:cNvPr id="1" name=""/>
-        <p:cNvGrpSpPr/>
-        <p:nvPr/>
-      </p:nvGrpSpPr>
-      <p:grpSpPr>
-        <a:xfrm>
-          <a:off x="0" y="0"/>
-          <a:ext cx="0" cy="0"/>
-          <a:chOff x="0" y="0"/>
-          <a:chExt cx="0" cy="0"/>
-        </a:xfrm>
-      </p:grpSpPr>
-      <p:sp>
-        <p:nvSpPr>
-          <p:cNvPr id="2" name="Text 0"/>
-          <p:cNvSpPr/>
-          <p:nvPr/>
-        </p:nvSpPr>
-        <p:spPr>
-          <a:xfrm>
-            <a:off x="7040880" y="64008"/>
-            <a:ext cx="2011680" cy="256032"/>
-          </a:xfrm>
-          <a:prstGeom prst="rect">
-            <a:avLst/>
-          </a:prstGeom>
-          <a:noFill/>
-          <a:ln/>
-        </p:spPr>
-        <p:txBody>
-          <a:bodyPr wrap="square" rtlCol="0" anchor="ctr"/>
-          <a:lstStyle/>
-          <a:p>
-            <a:pPr marL="0" indent="0" algn="r">
-              <a:buNone/>
-            </a:pPr>
-            <a:r>
-              <a:rPr lang="en-US" sz="1000" b="1" dirty="0">
-                <a:solidFill>
-                  <a:srgbClr val="39FF14"/>
-                </a:solidFill>
-                <a:latin typeface="Courier New" pitchFamily="34" charset="0"/>
-                <a:ea typeface="Courier New" pitchFamily="34" charset="-122"/>
-                <a:cs typeface="Courier New" pitchFamily="34" charset="-120"/>
-              </a:rPr>
-              <a:t>1UP  22/22</a:t>
-            </a:r>
-            <a:endParaRPr lang="en-US" sz="1000" dirty="0"/>
-          </a:p>
-        </p:txBody>
-      </p:sp>
-      <p:sp>
-        <p:nvSpPr>
-          <p:cNvPr id="3" name="Shape 1"/>
-          <p:cNvSpPr/>
-          <p:nvPr/>
-        </p:nvSpPr>
-        <p:spPr>
-          <a:xfrm>
-            <a:off x="0" y="4480560"/>
-            <a:ext cx="9144000" cy="662940"/>
-          </a:xfrm>
-          <a:prstGeom prst="rect">
-            <a:avLst/>
-          </a:prstGeom>
-          <a:solidFill>
-            <a:srgbClr val="0A0A0A"/>
-          </a:solidFill>
-          <a:ln w="12700">
-            <a:solidFill>
-              <a:srgbClr val="333333"/>
-            </a:solidFill>
-            <a:prstDash val="solid"/>
-          </a:ln>
-        </p:spPr>
-        <p:txBody>
-          <a:bodyPr/>
-          <a:lstStyle/>
-          <a:p>
-            <a:endParaRPr lang="en-US"/>
-          </a:p>
-        </p:txBody>
-      </p:sp>
-      <p:sp>
-        <p:nvSpPr>
-          <p:cNvPr id="4" name="Shape 2"/>
-          <p:cNvSpPr/>
-          <p:nvPr/>
-        </p:nvSpPr>
-        <p:spPr>
-          <a:xfrm>
-            <a:off x="0" y="4480560"/>
-            <a:ext cx="9144000" cy="36576"/>
-          </a:xfrm>
-          <a:prstGeom prst="rect">
-            <a:avLst/>
-          </a:prstGeom>
-          <a:solidFill>
-            <a:srgbClr val="FF6B00"/>
-          </a:solidFill>
-          <a:ln w="12700">
-            <a:solidFill>
-              <a:srgbClr val="333333"/>
-            </a:solidFill>
-            <a:prstDash val="solid"/>
-          </a:ln>
-        </p:spPr>
-        <p:txBody>
-          <a:bodyPr/>
-          <a:lstStyle/>
-          <a:p>
-            <a:endParaRPr lang="en-US"/>
-          </a:p>
-        </p:txBody>
-      </p:sp>
-      <p:sp>
-        <p:nvSpPr>
-          <p:cNvPr id="5" name="Shape 3"/>
-          <p:cNvSpPr/>
-          <p:nvPr/>
-        </p:nvSpPr>
-        <p:spPr>
-          <a:xfrm>
-            <a:off x="0" y="4480560"/>
-            <a:ext cx="73152" cy="662940"/>
-          </a:xfrm>
-          <a:prstGeom prst="rect">
-            <a:avLst/>
-          </a:prstGeom>
-          <a:solidFill>
-            <a:srgbClr val="FF6B00"/>
-          </a:solidFill>
-          <a:ln w="12700">
-            <a:solidFill>
-              <a:srgbClr val="333333"/>
-            </a:solidFill>
-            <a:prstDash val="solid"/>
-          </a:ln>
-        </p:spPr>
-        <p:txBody>
-          <a:bodyPr/>
-          <a:lstStyle/>
-          <a:p>
-            <a:endParaRPr lang="en-US"/>
-          </a:p>
-        </p:txBody>
-      </p:sp>
-      <p:sp>
-        <p:nvSpPr>
-          <p:cNvPr id="6" name="Shape 4"/>
-          <p:cNvSpPr/>
-          <p:nvPr/>
-        </p:nvSpPr>
-        <p:spPr>
-          <a:xfrm>
-            <a:off x="9070848" y="4480560"/>
-            <a:ext cx="73152" cy="662940"/>
-          </a:xfrm>
-          <a:prstGeom prst="rect">
-            <a:avLst/>
-          </a:prstGeom>
-          <a:solidFill>
-            <a:srgbClr val="FF6B00"/>
-          </a:solidFill>
-          <a:ln w="12700">
-            <a:solidFill>
-              <a:srgbClr val="333333"/>
-            </a:solidFill>
-            <a:prstDash val="solid"/>
-          </a:ln>
-        </p:spPr>
-        <p:txBody>
-          <a:bodyPr/>
-          <a:lstStyle/>
-          <a:p>
-            <a:endParaRPr lang="en-US"/>
-          </a:p>
-        </p:txBody>
-      </p:sp>
-      <p:sp>
-        <p:nvSpPr>
-          <p:cNvPr id="7" name="Text 5"/>
-          <p:cNvSpPr/>
-          <p:nvPr/>
-        </p:nvSpPr>
-        <p:spPr>
-          <a:xfrm>
-            <a:off x="109728" y="4480560"/>
-            <a:ext cx="8924544" cy="365760"/>
-          </a:xfrm>
-          <a:prstGeom prst="rect">
-            <a:avLst/>
-          </a:prstGeom>
-          <a:noFill/>
-          <a:ln/>
-        </p:spPr>
-        <p:txBody>
-          <a:bodyPr wrap="square" lIns="0" tIns="0" rIns="0" bIns="0" rtlCol="0" anchor="ctr"/>
-          <a:lstStyle/>
-          <a:p>
-            <a:pPr marL="0" indent="0" algn="ctr">
-              <a:buNone/>
-            </a:pPr>
-            <a:r>
-              <a:rPr lang="en-US" sz="1200" b="1" dirty="0">
-                <a:solidFill>
-                  <a:srgbClr val="FF6B00"/>
-                </a:solidFill>
-                <a:latin typeface="Courier New" pitchFamily="34" charset="0"/>
-                <a:ea typeface="Courier New" pitchFamily="34" charset="-122"/>
-                <a:cs typeface="Courier New" pitchFamily="34" charset="-120"/>
-              </a:rPr>
-              <a:t>◄ LEVEL 6 :: CONTINUE? ►</a:t>
-            </a:r>
-            <a:endParaRPr lang="en-US" sz="1200" dirty="0"/>
-          </a:p>
-        </p:txBody>
-      </p:sp>
-      <p:sp>
-        <p:nvSpPr>
-          <p:cNvPr id="8" name="Text 6"/>
-          <p:cNvSpPr/>
-          <p:nvPr/>
-        </p:nvSpPr>
-        <p:spPr>
-          <a:xfrm>
-            <a:off x="109728" y="4864608"/>
-            <a:ext cx="8924544" cy="256032"/>
-          </a:xfrm>
-          <a:prstGeom prst="rect">
-            <a:avLst/>
-          </a:prstGeom>
-          <a:noFill/>
-          <a:ln/>
-        </p:spPr>
-        <p:txBody>
-          <a:bodyPr wrap="square" lIns="0" tIns="0" rIns="0" bIns="0" rtlCol="0" anchor="ctr"/>
-          <a:lstStyle/>
-          <a:p>
-            <a:pPr marL="0" indent="0" algn="ctr">
-              <a:buNone/>
-            </a:pPr>
-            <a:r>
-              <a:rPr lang="en-US" sz="800" dirty="0">
-                <a:solidFill>
-                  <a:srgbClr val="555555"/>
-                </a:solidFill>
-                <a:latin typeface="Courier New" pitchFamily="34" charset="0"/>
-                <a:ea typeface="Courier New" pitchFamily="34" charset="-122"/>
-                <a:cs typeface="Courier New" pitchFamily="34" charset="-120"/>
-              </a:rPr>
-              <a:t>SREDAY AUSTIN Q2  ·  MAY 11, 2026  ·  MICHAEL FORRESTER</a:t>
-            </a:r>
-            <a:endParaRPr lang="en-US" sz="800" dirty="0"/>
-          </a:p>
-        </p:txBody>
-      </p:sp>
-      <p:sp>
-        <p:nvSpPr>
-          <p:cNvPr id="9" name="Text 7"/>
-          <p:cNvSpPr/>
-          <p:nvPr/>
-        </p:nvSpPr>
-        <p:spPr>
-          <a:xfrm>
-            <a:off x="274320" y="292608"/>
-            <a:ext cx="8595360" cy="457200"/>
-          </a:xfrm>
-          <a:prstGeom prst="rect">
-            <a:avLst/>
-          </a:prstGeom>
-          <a:noFill/>
-          <a:ln/>
-        </p:spPr>
-        <p:txBody>
-          <a:bodyPr wrap="square" lIns="0" tIns="0" rIns="0" bIns="0" rtlCol="0" anchor="ctr"/>
-          <a:lstStyle/>
-          <a:p>
-            <a:pPr marL="0" indent="0" algn="l">
-              <a:buNone/>
-            </a:pPr>
-            <a:r>
-              <a:rPr lang="en-US" sz="2800" b="1" dirty="0">
-                <a:solidFill>
-                  <a:srgbClr val="FF6B00"/>
-                </a:solidFill>
-                <a:latin typeface="Courier New" pitchFamily="34" charset="0"/>
-                <a:ea typeface="Courier New" pitchFamily="34" charset="-122"/>
-                <a:cs typeface="Courier New" pitchFamily="34" charset="-120"/>
-              </a:rPr>
-              <a:t>&gt; READING LIST</a:t>
-            </a:r>
-            <a:endParaRPr lang="en-US" sz="2800" dirty="0"/>
-          </a:p>
-        </p:txBody>
-      </p:sp>
-      <p:sp>
-        <p:nvSpPr>
-          <p:cNvPr id="10" name="Text 8"/>
-          <p:cNvSpPr/>
-          <p:nvPr/>
-        </p:nvSpPr>
-        <p:spPr>
-          <a:xfrm>
-            <a:off x="274320" y="713232"/>
-            <a:ext cx="8595360" cy="256032"/>
-          </a:xfrm>
-          <a:prstGeom prst="rect">
-            <a:avLst/>
-          </a:prstGeom>
-          <a:noFill/>
-          <a:ln/>
-        </p:spPr>
-        <p:txBody>
-          <a:bodyPr wrap="square" rtlCol="0" anchor="ctr"/>
-          <a:lstStyle/>
-          <a:p>
-            <a:pPr marL="0" indent="0">
-              <a:buNone/>
-            </a:pPr>
-            <a:r>
-              <a:rPr lang="en-US" sz="1000" dirty="0">
-                <a:solidFill>
-                  <a:srgbClr val="555555"/>
-                </a:solidFill>
-                <a:latin typeface="Courier New" pitchFamily="34" charset="0"/>
-                <a:ea typeface="Courier New" pitchFamily="34" charset="-122"/>
-                <a:cs typeface="Courier New" pitchFamily="34" charset="-120"/>
-              </a:rPr>
-              <a:t>WHERE THIS SITS IN THE BROADER LITERATURE.</a:t>
-            </a:r>
-            <a:endParaRPr lang="en-US" sz="1000" dirty="0"/>
-          </a:p>
-        </p:txBody>
-      </p:sp>
-      <p:sp>
-        <p:nvSpPr>
-          <p:cNvPr id="11" name="Shape 9"/>
-          <p:cNvSpPr/>
-          <p:nvPr/>
-        </p:nvSpPr>
-        <p:spPr>
-          <a:xfrm>
-            <a:off x="274320" y="1078992"/>
-            <a:ext cx="4297680" cy="713232"/>
-          </a:xfrm>
-          <a:prstGeom prst="rect">
-            <a:avLst/>
-          </a:prstGeom>
-          <a:solidFill>
-            <a:srgbClr val="0E0E14"/>
-          </a:solidFill>
-          <a:ln w="12700">
-            <a:solidFill>
-              <a:srgbClr val="39FF14"/>
-            </a:solidFill>
-            <a:prstDash val="solid"/>
-          </a:ln>
-        </p:spPr>
-        <p:txBody>
-          <a:bodyPr/>
-          <a:lstStyle/>
-          <a:p>
-            <a:endParaRPr lang="en-US"/>
-          </a:p>
-        </p:txBody>
-      </p:sp>
-      <p:sp>
-        <p:nvSpPr>
-          <p:cNvPr id="12" name="Shape 10"/>
-          <p:cNvSpPr/>
-          <p:nvPr/>
-        </p:nvSpPr>
-        <p:spPr>
-          <a:xfrm>
-            <a:off x="274320" y="1078992"/>
-            <a:ext cx="73152" cy="713232"/>
-          </a:xfrm>
-          <a:prstGeom prst="rect">
-            <a:avLst/>
-          </a:prstGeom>
-          <a:solidFill>
-            <a:srgbClr val="39FF14"/>
-          </a:solidFill>
-          <a:ln w="12700">
-            <a:solidFill>
-              <a:srgbClr val="333333"/>
-            </a:solidFill>
-            <a:prstDash val="solid"/>
-          </a:ln>
-        </p:spPr>
-        <p:txBody>
-          <a:bodyPr/>
-          <a:lstStyle/>
-          <a:p>
-            <a:endParaRPr lang="en-US"/>
-          </a:p>
-        </p:txBody>
-      </p:sp>
-      <p:sp>
-        <p:nvSpPr>
-          <p:cNvPr id="13" name="Text 11"/>
-          <p:cNvSpPr/>
-          <p:nvPr/>
-        </p:nvSpPr>
-        <p:spPr>
-          <a:xfrm>
-            <a:off x="438912" y="1124712"/>
-            <a:ext cx="4069080" cy="292608"/>
-          </a:xfrm>
-          <a:prstGeom prst="rect">
-            <a:avLst/>
-          </a:prstGeom>
-          <a:noFill/>
-          <a:ln/>
-        </p:spPr>
-        <p:txBody>
-          <a:bodyPr wrap="square" lIns="0" tIns="0" rIns="0" bIns="0" rtlCol="0" anchor="ctr"/>
-          <a:lstStyle/>
-          <a:p>
-            <a:pPr marL="0" indent="0">
-              <a:buNone/>
-            </a:pPr>
-            <a:r>
-              <a:rPr lang="en-US" sz="1100" b="1" dirty="0">
-                <a:solidFill>
-                  <a:srgbClr val="39FF14"/>
-                </a:solidFill>
-                <a:latin typeface="Courier New" pitchFamily="34" charset="0"/>
-                <a:ea typeface="Courier New" pitchFamily="34" charset="-122"/>
-                <a:cs typeface="Courier New" pitchFamily="34" charset="-120"/>
-              </a:rPr>
-              <a:t>OWASP TOP 10 FOR LLM APPS</a:t>
-            </a:r>
-            <a:endParaRPr lang="en-US" sz="1100" dirty="0"/>
-          </a:p>
-        </p:txBody>
-      </p:sp>
-      <p:sp>
-        <p:nvSpPr>
-          <p:cNvPr id="14" name="Text 12"/>
-          <p:cNvSpPr/>
-          <p:nvPr/>
-        </p:nvSpPr>
-        <p:spPr>
-          <a:xfrm>
-            <a:off x="438912" y="1408176"/>
-            <a:ext cx="4069080" cy="329184"/>
-          </a:xfrm>
-          <a:prstGeom prst="rect">
-            <a:avLst/>
-          </a:prstGeom>
-          <a:noFill/>
-          <a:ln/>
-        </p:spPr>
-        <p:txBody>
-          <a:bodyPr wrap="square" lIns="0" tIns="0" rIns="0" bIns="0" rtlCol="0" anchor="ctr"/>
-          <a:lstStyle/>
-          <a:p>
-            <a:pPr marL="0" indent="0">
-              <a:buNone/>
-            </a:pPr>
-            <a:r>
-              <a:rPr lang="en-US" sz="900" dirty="0">
-                <a:solidFill>
-                  <a:srgbClr val="E8E8FF"/>
-                </a:solidFill>
-                <a:latin typeface="Courier New" pitchFamily="34" charset="0"/>
-                <a:ea typeface="Courier New" pitchFamily="34" charset="-122"/>
-                <a:cs typeface="Courier New" pitchFamily="34" charset="-120"/>
-              </a:rPr>
-              <a:t>Threat catalog (2025).</a:t>
-            </a:r>
-            <a:endParaRPr lang="en-US" sz="900" dirty="0"/>
-          </a:p>
-        </p:txBody>
-      </p:sp>
-      <p:sp>
-        <p:nvSpPr>
-          <p:cNvPr id="15" name="Shape 13"/>
-          <p:cNvSpPr/>
-          <p:nvPr/>
-        </p:nvSpPr>
-        <p:spPr>
-          <a:xfrm>
-            <a:off x="4617720" y="1078992"/>
-            <a:ext cx="4297680" cy="713232"/>
-          </a:xfrm>
-          <a:prstGeom prst="rect">
-            <a:avLst/>
-          </a:prstGeom>
-          <a:solidFill>
-            <a:srgbClr val="0E0E14"/>
-          </a:solidFill>
-          <a:ln w="12700">
-            <a:solidFill>
-              <a:srgbClr val="39FF14"/>
-            </a:solidFill>
-            <a:prstDash val="solid"/>
-          </a:ln>
-        </p:spPr>
-        <p:txBody>
-          <a:bodyPr/>
-          <a:lstStyle/>
-          <a:p>
-            <a:endParaRPr lang="en-US"/>
-          </a:p>
-        </p:txBody>
-      </p:sp>
-      <p:sp>
-        <p:nvSpPr>
-          <p:cNvPr id="16" name="Shape 14"/>
-          <p:cNvSpPr/>
-          <p:nvPr/>
-        </p:nvSpPr>
-        <p:spPr>
-          <a:xfrm>
-            <a:off x="4617720" y="1078992"/>
-            <a:ext cx="73152" cy="713232"/>
-          </a:xfrm>
-          <a:prstGeom prst="rect">
-            <a:avLst/>
-          </a:prstGeom>
-          <a:solidFill>
-            <a:srgbClr val="39FF14"/>
-          </a:solidFill>
-          <a:ln w="12700">
-            <a:solidFill>
-              <a:srgbClr val="333333"/>
-            </a:solidFill>
-            <a:prstDash val="solid"/>
-          </a:ln>
-        </p:spPr>
-        <p:txBody>
-          <a:bodyPr/>
-          <a:lstStyle/>
-          <a:p>
-            <a:endParaRPr lang="en-US"/>
-          </a:p>
-        </p:txBody>
-      </p:sp>
-      <p:sp>
-        <p:nvSpPr>
-          <p:cNvPr id="17" name="Text 15"/>
-          <p:cNvSpPr/>
-          <p:nvPr/>
-        </p:nvSpPr>
-        <p:spPr>
-          <a:xfrm>
-            <a:off x="4782312" y="1124712"/>
-            <a:ext cx="4069080" cy="292608"/>
-          </a:xfrm>
-          <a:prstGeom prst="rect">
-            <a:avLst/>
-          </a:prstGeom>
-          <a:noFill/>
-          <a:ln/>
-        </p:spPr>
-        <p:txBody>
-          <a:bodyPr wrap="square" lIns="0" tIns="0" rIns="0" bIns="0" rtlCol="0" anchor="ctr"/>
-          <a:lstStyle/>
-          <a:p>
-            <a:pPr marL="0" indent="0">
-              <a:buNone/>
-            </a:pPr>
-            <a:r>
-              <a:rPr lang="en-US" sz="1100" b="1" dirty="0">
-                <a:solidFill>
-                  <a:srgbClr val="39FF14"/>
-                </a:solidFill>
-                <a:latin typeface="Courier New" pitchFamily="34" charset="0"/>
-                <a:ea typeface="Courier New" pitchFamily="34" charset="-122"/>
-                <a:cs typeface="Courier New" pitchFamily="34" charset="-120"/>
-              </a:rPr>
-              <a:t>OWASP AGENTIC AI TOP 10</a:t>
-            </a:r>
-            <a:endParaRPr lang="en-US" sz="1100" dirty="0"/>
-          </a:p>
-        </p:txBody>
-      </p:sp>
-      <p:sp>
-        <p:nvSpPr>
-          <p:cNvPr id="18" name="Text 16"/>
-          <p:cNvSpPr/>
-          <p:nvPr/>
-        </p:nvSpPr>
-        <p:spPr>
-          <a:xfrm>
-            <a:off x="4782312" y="1408176"/>
-            <a:ext cx="4069080" cy="329184"/>
-          </a:xfrm>
-          <a:prstGeom prst="rect">
-            <a:avLst/>
-          </a:prstGeom>
-          <a:noFill/>
-          <a:ln/>
-        </p:spPr>
-        <p:txBody>
-          <a:bodyPr wrap="square" lIns="0" tIns="0" rIns="0" bIns="0" rtlCol="0" anchor="ctr"/>
-          <a:lstStyle/>
-          <a:p>
-            <a:pPr marL="0" indent="0">
-              <a:buNone/>
-            </a:pPr>
-            <a:r>
-              <a:rPr lang="en-US" sz="900" dirty="0">
-                <a:solidFill>
-                  <a:srgbClr val="E8E8FF"/>
-                </a:solidFill>
-                <a:latin typeface="Courier New" pitchFamily="34" charset="0"/>
-                <a:ea typeface="Courier New" pitchFamily="34" charset="-122"/>
-                <a:cs typeface="Courier New" pitchFamily="34" charset="-120"/>
-              </a:rPr>
-              <a:t>Excessive Agency (Dec 2025).</a:t>
-            </a:r>
-            <a:endParaRPr lang="en-US" sz="900" dirty="0"/>
-          </a:p>
-        </p:txBody>
-      </p:sp>
-      <p:sp>
-        <p:nvSpPr>
-          <p:cNvPr id="19" name="Shape 17"/>
-          <p:cNvSpPr/>
-          <p:nvPr/>
-        </p:nvSpPr>
-        <p:spPr>
-          <a:xfrm>
-            <a:off x="274320" y="1847088"/>
-            <a:ext cx="4297680" cy="713232"/>
-          </a:xfrm>
-          <a:prstGeom prst="rect">
-            <a:avLst/>
-          </a:prstGeom>
-          <a:solidFill>
-            <a:srgbClr val="0E0E14"/>
-          </a:solidFill>
-          <a:ln w="12700">
-            <a:solidFill>
-              <a:srgbClr val="00E5FF"/>
-            </a:solidFill>
-            <a:prstDash val="solid"/>
-          </a:ln>
-        </p:spPr>
-        <p:txBody>
-          <a:bodyPr/>
-          <a:lstStyle/>
-          <a:p>
-            <a:endParaRPr lang="en-US"/>
-          </a:p>
-        </p:txBody>
-      </p:sp>
-      <p:sp>
-        <p:nvSpPr>
-          <p:cNvPr id="20" name="Shape 18"/>
-          <p:cNvSpPr/>
-          <p:nvPr/>
-        </p:nvSpPr>
-        <p:spPr>
-          <a:xfrm>
-            <a:off x="274320" y="1847088"/>
-            <a:ext cx="73152" cy="713232"/>
-          </a:xfrm>
-          <a:prstGeom prst="rect">
-            <a:avLst/>
-          </a:prstGeom>
-          <a:solidFill>
-            <a:srgbClr val="00E5FF"/>
-          </a:solidFill>
-          <a:ln w="12700">
-            <a:solidFill>
-              <a:srgbClr val="333333"/>
-            </a:solidFill>
-            <a:prstDash val="solid"/>
-          </a:ln>
-        </p:spPr>
-        <p:txBody>
-          <a:bodyPr/>
-          <a:lstStyle/>
-          <a:p>
-            <a:endParaRPr lang="en-US"/>
-          </a:p>
-        </p:txBody>
-      </p:sp>
-      <p:sp>
-        <p:nvSpPr>
-          <p:cNvPr id="21" name="Text 19"/>
-          <p:cNvSpPr/>
-          <p:nvPr/>
-        </p:nvSpPr>
-        <p:spPr>
-          <a:xfrm>
-            <a:off x="438912" y="1892808"/>
-            <a:ext cx="4069080" cy="292608"/>
-          </a:xfrm>
-          <a:prstGeom prst="rect">
-            <a:avLst/>
-          </a:prstGeom>
-          <a:noFill/>
-          <a:ln/>
-        </p:spPr>
-        <p:txBody>
-          <a:bodyPr wrap="square" lIns="0" tIns="0" rIns="0" bIns="0" rtlCol="0" anchor="ctr"/>
-          <a:lstStyle/>
-          <a:p>
-            <a:pPr marL="0" indent="0">
-              <a:buNone/>
-            </a:pPr>
-            <a:r>
-              <a:rPr lang="en-US" sz="1100" b="1" dirty="0">
-                <a:solidFill>
-                  <a:srgbClr val="00E5FF"/>
-                </a:solidFill>
-                <a:latin typeface="Courier New" pitchFamily="34" charset="0"/>
-                <a:ea typeface="Courier New" pitchFamily="34" charset="-122"/>
-                <a:cs typeface="Courier New" pitchFamily="34" charset="-120"/>
-              </a:rPr>
-              <a:t>CSA MAESTRO</a:t>
-            </a:r>
-            <a:endParaRPr lang="en-US" sz="1100" dirty="0"/>
-          </a:p>
-        </p:txBody>
-      </p:sp>
-      <p:sp>
-        <p:nvSpPr>
-          <p:cNvPr id="22" name="Text 20"/>
-          <p:cNvSpPr/>
-          <p:nvPr/>
-        </p:nvSpPr>
-        <p:spPr>
-          <a:xfrm>
-            <a:off x="438912" y="2176272"/>
-            <a:ext cx="4069080" cy="329184"/>
-          </a:xfrm>
-          <a:prstGeom prst="rect">
-            <a:avLst/>
-          </a:prstGeom>
-          <a:noFill/>
-          <a:ln/>
-        </p:spPr>
-        <p:txBody>
-          <a:bodyPr wrap="square" lIns="0" tIns="0" rIns="0" bIns="0" rtlCol="0" anchor="ctr"/>
-          <a:lstStyle/>
-          <a:p>
-            <a:pPr marL="0" indent="0">
-              <a:buNone/>
-            </a:pPr>
-            <a:r>
-              <a:rPr lang="en-US" sz="900" dirty="0">
-                <a:solidFill>
-                  <a:srgbClr val="E8E8FF"/>
-                </a:solidFill>
-                <a:latin typeface="Courier New" pitchFamily="34" charset="0"/>
-                <a:ea typeface="Courier New" pitchFamily="34" charset="-122"/>
-                <a:cs typeface="Courier New" pitchFamily="34" charset="-120"/>
-              </a:rPr>
-              <a:t>7-layer threat model (2025).</a:t>
-            </a:r>
-            <a:endParaRPr lang="en-US" sz="900" dirty="0"/>
-          </a:p>
-        </p:txBody>
-      </p:sp>
-      <p:sp>
-        <p:nvSpPr>
-          <p:cNvPr id="23" name="Shape 21"/>
-          <p:cNvSpPr/>
-          <p:nvPr/>
-        </p:nvSpPr>
-        <p:spPr>
-          <a:xfrm>
-            <a:off x="4617720" y="1847088"/>
-            <a:ext cx="4297680" cy="713232"/>
-          </a:xfrm>
-          <a:prstGeom prst="rect">
-            <a:avLst/>
-          </a:prstGeom>
-          <a:solidFill>
-            <a:srgbClr val="0E0E14"/>
-          </a:solidFill>
-          <a:ln w="12700">
-            <a:solidFill>
-              <a:srgbClr val="00E5FF"/>
-            </a:solidFill>
-            <a:prstDash val="solid"/>
-          </a:ln>
-        </p:spPr>
-        <p:txBody>
-          <a:bodyPr/>
-          <a:lstStyle/>
-          <a:p>
-            <a:endParaRPr lang="en-US"/>
-          </a:p>
-        </p:txBody>
-      </p:sp>
-      <p:sp>
-        <p:nvSpPr>
-          <p:cNvPr id="24" name="Shape 22"/>
-          <p:cNvSpPr/>
-          <p:nvPr/>
-        </p:nvSpPr>
-        <p:spPr>
-          <a:xfrm>
-            <a:off x="4617720" y="1847088"/>
-            <a:ext cx="73152" cy="713232"/>
-          </a:xfrm>
-          <a:prstGeom prst="rect">
-            <a:avLst/>
-          </a:prstGeom>
-          <a:solidFill>
-            <a:srgbClr val="00E5FF"/>
-          </a:solidFill>
-          <a:ln w="12700">
-            <a:solidFill>
-              <a:srgbClr val="333333"/>
-            </a:solidFill>
-            <a:prstDash val="solid"/>
-          </a:ln>
-        </p:spPr>
-        <p:txBody>
-          <a:bodyPr/>
-          <a:lstStyle/>
-          <a:p>
-            <a:endParaRPr lang="en-US"/>
-          </a:p>
-        </p:txBody>
-      </p:sp>
-      <p:sp>
-        <p:nvSpPr>
-          <p:cNvPr id="25" name="Text 23"/>
-          <p:cNvSpPr/>
-          <p:nvPr/>
-        </p:nvSpPr>
-        <p:spPr>
-          <a:xfrm>
-            <a:off x="4782312" y="1892808"/>
-            <a:ext cx="4069080" cy="292608"/>
-          </a:xfrm>
-          <a:prstGeom prst="rect">
-            <a:avLst/>
-          </a:prstGeom>
-          <a:noFill/>
-          <a:ln/>
-        </p:spPr>
-        <p:txBody>
-          <a:bodyPr wrap="square" lIns="0" tIns="0" rIns="0" bIns="0" rtlCol="0" anchor="ctr"/>
-          <a:lstStyle/>
-          <a:p>
-            <a:pPr marL="0" indent="0">
-              <a:buNone/>
-            </a:pPr>
-            <a:r>
-              <a:rPr lang="en-US" sz="1100" b="1" dirty="0">
-                <a:solidFill>
-                  <a:srgbClr val="00E5FF"/>
-                </a:solidFill>
-                <a:latin typeface="Courier New" pitchFamily="34" charset="0"/>
-                <a:ea typeface="Courier New" pitchFamily="34" charset="-122"/>
-                <a:cs typeface="Courier New" pitchFamily="34" charset="-120"/>
-              </a:rPr>
-              <a:t>NIST CSF 2.0 / AI RMF</a:t>
-            </a:r>
-            <a:endParaRPr lang="en-US" sz="1100" dirty="0"/>
-          </a:p>
-        </p:txBody>
-      </p:sp>
-      <p:sp>
-        <p:nvSpPr>
-          <p:cNvPr id="26" name="Text 24"/>
-          <p:cNvSpPr/>
-          <p:nvPr/>
-        </p:nvSpPr>
-        <p:spPr>
-          <a:xfrm>
-            <a:off x="4782312" y="2176272"/>
-            <a:ext cx="4069080" cy="329184"/>
-          </a:xfrm>
-          <a:prstGeom prst="rect">
-            <a:avLst/>
-          </a:prstGeom>
-          <a:noFill/>
-          <a:ln/>
-        </p:spPr>
-        <p:txBody>
-          <a:bodyPr wrap="square" lIns="0" tIns="0" rIns="0" bIns="0" rtlCol="0" anchor="ctr"/>
-          <a:lstStyle/>
-          <a:p>
-            <a:pPr marL="0" indent="0">
-              <a:buNone/>
-            </a:pPr>
-            <a:r>
-              <a:rPr lang="en-US" sz="900" dirty="0">
-                <a:solidFill>
-                  <a:srgbClr val="E8E8FF"/>
-                </a:solidFill>
-                <a:latin typeface="Courier New" pitchFamily="34" charset="0"/>
-                <a:ea typeface="Courier New" pitchFamily="34" charset="-122"/>
-                <a:cs typeface="Courier New" pitchFamily="34" charset="-120"/>
-              </a:rPr>
-              <a:t>Identify · Protect · Detect · Respond.</a:t>
-            </a:r>
-            <a:endParaRPr lang="en-US" sz="900" dirty="0"/>
-          </a:p>
-        </p:txBody>
-      </p:sp>
-      <p:sp>
-        <p:nvSpPr>
-          <p:cNvPr id="27" name="Shape 25"/>
-          <p:cNvSpPr/>
-          <p:nvPr/>
-        </p:nvSpPr>
-        <p:spPr>
-          <a:xfrm>
-            <a:off x="274320" y="2615184"/>
-            <a:ext cx="4297680" cy="713232"/>
-          </a:xfrm>
-          <a:prstGeom prst="rect">
-            <a:avLst/>
-          </a:prstGeom>
-          <a:solidFill>
-            <a:srgbClr val="0E0E14"/>
-          </a:solidFill>
-          <a:ln w="12700">
-            <a:solidFill>
-              <a:srgbClr val="FF00DC"/>
-            </a:solidFill>
-            <a:prstDash val="solid"/>
-          </a:ln>
-        </p:spPr>
-        <p:txBody>
-          <a:bodyPr/>
-          <a:lstStyle/>
-          <a:p>
-            <a:endParaRPr lang="en-US"/>
-          </a:p>
-        </p:txBody>
-      </p:sp>
-      <p:sp>
-        <p:nvSpPr>
-          <p:cNvPr id="28" name="Shape 26"/>
-          <p:cNvSpPr/>
-          <p:nvPr/>
-        </p:nvSpPr>
-        <p:spPr>
-          <a:xfrm>
-            <a:off x="274320" y="2615184"/>
-            <a:ext cx="73152" cy="713232"/>
-          </a:xfrm>
-          <a:prstGeom prst="rect">
-            <a:avLst/>
-          </a:prstGeom>
-          <a:solidFill>
-            <a:srgbClr val="FF00DC"/>
-          </a:solidFill>
-          <a:ln w="12700">
-            <a:solidFill>
-              <a:srgbClr val="333333"/>
-            </a:solidFill>
-            <a:prstDash val="solid"/>
-          </a:ln>
-        </p:spPr>
-        <p:txBody>
-          <a:bodyPr/>
-          <a:lstStyle/>
-          <a:p>
-            <a:endParaRPr lang="en-US"/>
-          </a:p>
-        </p:txBody>
-      </p:sp>
-      <p:sp>
-        <p:nvSpPr>
-          <p:cNvPr id="29" name="Text 27"/>
-          <p:cNvSpPr/>
-          <p:nvPr/>
-        </p:nvSpPr>
-        <p:spPr>
-          <a:xfrm>
-            <a:off x="438912" y="2660904"/>
-            <a:ext cx="4069080" cy="292608"/>
-          </a:xfrm>
-          <a:prstGeom prst="rect">
-            <a:avLst/>
-          </a:prstGeom>
-          <a:noFill/>
-          <a:ln/>
-        </p:spPr>
-        <p:txBody>
-          <a:bodyPr wrap="square" lIns="0" tIns="0" rIns="0" bIns="0" rtlCol="0" anchor="ctr"/>
-          <a:lstStyle/>
-          <a:p>
-            <a:pPr marL="0" indent="0">
-              <a:buNone/>
-            </a:pPr>
-            <a:r>
-              <a:rPr lang="en-US" sz="1100" b="1" dirty="0">
-                <a:solidFill>
-                  <a:srgbClr val="FF00DC"/>
-                </a:solidFill>
-                <a:latin typeface="Courier New" pitchFamily="34" charset="0"/>
-                <a:ea typeface="Courier New" pitchFamily="34" charset="-122"/>
-                <a:cs typeface="Courier New" pitchFamily="34" charset="-120"/>
-              </a:rPr>
-              <a:t>MITRE ATLAS</a:t>
-            </a:r>
-            <a:endParaRPr lang="en-US" sz="1100" dirty="0"/>
-          </a:p>
-        </p:txBody>
-      </p:sp>
-      <p:sp>
-        <p:nvSpPr>
-          <p:cNvPr id="30" name="Text 28"/>
-          <p:cNvSpPr/>
-          <p:nvPr/>
-        </p:nvSpPr>
-        <p:spPr>
-          <a:xfrm>
-            <a:off x="438912" y="2944368"/>
-            <a:ext cx="4069080" cy="329184"/>
-          </a:xfrm>
-          <a:prstGeom prst="rect">
-            <a:avLst/>
-          </a:prstGeom>
-          <a:noFill/>
-          <a:ln/>
-        </p:spPr>
-        <p:txBody>
-          <a:bodyPr wrap="square" lIns="0" tIns="0" rIns="0" bIns="0" rtlCol="0" anchor="ctr"/>
-          <a:lstStyle/>
-          <a:p>
-            <a:pPr marL="0" indent="0">
-              <a:buNone/>
-            </a:pPr>
-            <a:r>
-              <a:rPr lang="en-US" sz="900" dirty="0">
-                <a:solidFill>
-                  <a:srgbClr val="E8E8FF"/>
-                </a:solidFill>
-                <a:latin typeface="Courier New" pitchFamily="34" charset="0"/>
-                <a:ea typeface="Courier New" pitchFamily="34" charset="-122"/>
-                <a:cs typeface="Courier New" pitchFamily="34" charset="-120"/>
-              </a:rPr>
-              <a:t>Adversarial attack catalog.</a:t>
-            </a:r>
-            <a:endParaRPr lang="en-US" sz="900" dirty="0"/>
-          </a:p>
-        </p:txBody>
-      </p:sp>
-      <p:sp>
-        <p:nvSpPr>
-          <p:cNvPr id="31" name="Shape 29"/>
-          <p:cNvSpPr/>
-          <p:nvPr/>
-        </p:nvSpPr>
-        <p:spPr>
-          <a:xfrm>
-            <a:off x="4617720" y="2615184"/>
-            <a:ext cx="4297680" cy="713232"/>
-          </a:xfrm>
-          <a:prstGeom prst="rect">
-            <a:avLst/>
-          </a:prstGeom>
-          <a:solidFill>
-            <a:srgbClr val="0E0E14"/>
-          </a:solidFill>
-          <a:ln w="12700">
-            <a:solidFill>
-              <a:srgbClr val="FF00DC"/>
-            </a:solidFill>
-            <a:prstDash val="solid"/>
-          </a:ln>
-        </p:spPr>
-        <p:txBody>
-          <a:bodyPr/>
-          <a:lstStyle/>
-          <a:p>
-            <a:endParaRPr lang="en-US"/>
-          </a:p>
-        </p:txBody>
-      </p:sp>
-      <p:sp>
-        <p:nvSpPr>
-          <p:cNvPr id="32" name="Shape 30"/>
-          <p:cNvSpPr/>
-          <p:nvPr/>
-        </p:nvSpPr>
-        <p:spPr>
-          <a:xfrm>
-            <a:off x="4617720" y="2615184"/>
-            <a:ext cx="73152" cy="713232"/>
-          </a:xfrm>
-          <a:prstGeom prst="rect">
-            <a:avLst/>
-          </a:prstGeom>
-          <a:solidFill>
-            <a:srgbClr val="FF00DC"/>
-          </a:solidFill>
-          <a:ln w="12700">
-            <a:solidFill>
-              <a:srgbClr val="333333"/>
-            </a:solidFill>
-            <a:prstDash val="solid"/>
-          </a:ln>
-        </p:spPr>
-        <p:txBody>
-          <a:bodyPr/>
-          <a:lstStyle/>
-          <a:p>
-            <a:endParaRPr lang="en-US"/>
-          </a:p>
-        </p:txBody>
-      </p:sp>
-      <p:sp>
-        <p:nvSpPr>
-          <p:cNvPr id="33" name="Text 31"/>
-          <p:cNvSpPr/>
-          <p:nvPr/>
-        </p:nvSpPr>
-        <p:spPr>
-          <a:xfrm>
-            <a:off x="4782312" y="2660904"/>
-            <a:ext cx="4069080" cy="292608"/>
-          </a:xfrm>
-          <a:prstGeom prst="rect">
-            <a:avLst/>
-          </a:prstGeom>
-          <a:noFill/>
-          <a:ln/>
-        </p:spPr>
-        <p:txBody>
-          <a:bodyPr wrap="square" lIns="0" tIns="0" rIns="0" bIns="0" rtlCol="0" anchor="ctr"/>
-          <a:lstStyle/>
-          <a:p>
-            <a:pPr marL="0" indent="0">
-              <a:buNone/>
-            </a:pPr>
-            <a:r>
-              <a:rPr lang="en-US" sz="1100" b="1" dirty="0">
-                <a:solidFill>
-                  <a:srgbClr val="FF00DC"/>
-                </a:solidFill>
-                <a:latin typeface="Courier New" pitchFamily="34" charset="0"/>
-                <a:ea typeface="Courier New" pitchFamily="34" charset="-122"/>
-                <a:cs typeface="Courier New" pitchFamily="34" charset="-120"/>
-              </a:rPr>
-              <a:t>NIST SP 800-207</a:t>
-            </a:r>
-            <a:endParaRPr lang="en-US" sz="1100" dirty="0"/>
-          </a:p>
-        </p:txBody>
-      </p:sp>
-      <p:sp>
-        <p:nvSpPr>
-          <p:cNvPr id="34" name="Text 32"/>
-          <p:cNvSpPr/>
-          <p:nvPr/>
-        </p:nvSpPr>
-        <p:spPr>
-          <a:xfrm>
-            <a:off x="4782312" y="2944368"/>
-            <a:ext cx="4069080" cy="329184"/>
-          </a:xfrm>
-          <a:prstGeom prst="rect">
-            <a:avLst/>
-          </a:prstGeom>
-          <a:noFill/>
-          <a:ln/>
-        </p:spPr>
-        <p:txBody>
-          <a:bodyPr wrap="square" lIns="0" tIns="0" rIns="0" bIns="0" rtlCol="0" anchor="ctr"/>
-          <a:lstStyle/>
-          <a:p>
-            <a:pPr marL="0" indent="0">
-              <a:buNone/>
-            </a:pPr>
-            <a:r>
-              <a:rPr lang="en-US" sz="900" dirty="0">
-                <a:solidFill>
-                  <a:srgbClr val="E8E8FF"/>
-                </a:solidFill>
-                <a:latin typeface="Courier New" pitchFamily="34" charset="0"/>
-                <a:ea typeface="Courier New" pitchFamily="34" charset="-122"/>
-                <a:cs typeface="Courier New" pitchFamily="34" charset="-120"/>
-              </a:rPr>
-              <a:t>Zero Trust for non-human actors.</a:t>
-            </a:r>
-            <a:endParaRPr lang="en-US" sz="900" dirty="0"/>
-          </a:p>
-        </p:txBody>
-      </p:sp>
-      <p:sp>
-        <p:nvSpPr>
-          <p:cNvPr id="35" name="Shape 33"/>
-          <p:cNvSpPr/>
-          <p:nvPr/>
-        </p:nvSpPr>
-        <p:spPr>
-          <a:xfrm>
-            <a:off x="274320" y="3383280"/>
-            <a:ext cx="4297680" cy="713232"/>
-          </a:xfrm>
-          <a:prstGeom prst="rect">
-            <a:avLst/>
-          </a:prstGeom>
-          <a:solidFill>
-            <a:srgbClr val="0E0E14"/>
-          </a:solidFill>
-          <a:ln w="12700">
-            <a:solidFill>
-              <a:srgbClr val="FFE500"/>
-            </a:solidFill>
-            <a:prstDash val="solid"/>
-          </a:ln>
-        </p:spPr>
-        <p:txBody>
-          <a:bodyPr/>
-          <a:lstStyle/>
-          <a:p>
-            <a:endParaRPr lang="en-US"/>
-          </a:p>
-        </p:txBody>
-      </p:sp>
-      <p:sp>
-        <p:nvSpPr>
-          <p:cNvPr id="36" name="Shape 34"/>
-          <p:cNvSpPr/>
-          <p:nvPr/>
-        </p:nvSpPr>
-        <p:spPr>
-          <a:xfrm>
-            <a:off x="274320" y="3383280"/>
-            <a:ext cx="73152" cy="713232"/>
-          </a:xfrm>
-          <a:prstGeom prst="rect">
-            <a:avLst/>
-          </a:prstGeom>
-          <a:solidFill>
-            <a:srgbClr val="FFE500"/>
-          </a:solidFill>
-          <a:ln w="12700">
-            <a:solidFill>
-              <a:srgbClr val="333333"/>
-            </a:solidFill>
-            <a:prstDash val="solid"/>
-          </a:ln>
-        </p:spPr>
-        <p:txBody>
-          <a:bodyPr/>
-          <a:lstStyle/>
-          <a:p>
-            <a:endParaRPr lang="en-US"/>
-          </a:p>
-        </p:txBody>
-      </p:sp>
-      <p:sp>
-        <p:nvSpPr>
-          <p:cNvPr id="37" name="Text 35"/>
-          <p:cNvSpPr/>
-          <p:nvPr/>
-        </p:nvSpPr>
-        <p:spPr>
-          <a:xfrm>
-            <a:off x="438912" y="3429000"/>
-            <a:ext cx="4069080" cy="292608"/>
-          </a:xfrm>
-          <a:prstGeom prst="rect">
-            <a:avLst/>
-          </a:prstGeom>
-          <a:noFill/>
-          <a:ln/>
-        </p:spPr>
-        <p:txBody>
-          <a:bodyPr wrap="square" lIns="0" tIns="0" rIns="0" bIns="0" rtlCol="0" anchor="ctr"/>
-          <a:lstStyle/>
-          <a:p>
-            <a:pPr marL="0" indent="0">
-              <a:buNone/>
-            </a:pPr>
-            <a:r>
-              <a:rPr lang="en-US" sz="1100" b="1" dirty="0">
-                <a:solidFill>
-                  <a:srgbClr val="FFE500"/>
-                </a:solidFill>
-                <a:latin typeface="Courier New" pitchFamily="34" charset="0"/>
-                <a:ea typeface="Courier New" pitchFamily="34" charset="-122"/>
-                <a:cs typeface="Courier New" pitchFamily="34" charset="-120"/>
-              </a:rPr>
-              <a:t>WILLISON: LETHAL TRIFECTA</a:t>
-            </a:r>
-            <a:endParaRPr lang="en-US" sz="1100" dirty="0"/>
-          </a:p>
-        </p:txBody>
-      </p:sp>
-      <p:sp>
-        <p:nvSpPr>
-          <p:cNvPr id="38" name="Text 36"/>
-          <p:cNvSpPr/>
-          <p:nvPr/>
-        </p:nvSpPr>
-        <p:spPr>
-          <a:xfrm>
-            <a:off x="438912" y="3712464"/>
-            <a:ext cx="4069080" cy="329184"/>
-          </a:xfrm>
-          <a:prstGeom prst="rect">
-            <a:avLst/>
-          </a:prstGeom>
-          <a:noFill/>
-          <a:ln/>
-        </p:spPr>
-        <p:txBody>
-          <a:bodyPr wrap="square" lIns="0" tIns="0" rIns="0" bIns="0" rtlCol="0" anchor="ctr"/>
-          <a:lstStyle/>
-          <a:p>
-            <a:pPr marL="0" indent="0">
-              <a:buNone/>
-            </a:pPr>
-            <a:r>
-              <a:rPr lang="en-US" sz="900" dirty="0">
-                <a:solidFill>
-                  <a:srgbClr val="E8E8FF"/>
-                </a:solidFill>
-                <a:latin typeface="Courier New" pitchFamily="34" charset="0"/>
-                <a:ea typeface="Courier New" pitchFamily="34" charset="-122"/>
-                <a:cs typeface="Courier New" pitchFamily="34" charset="-120"/>
-              </a:rPr>
-              <a:t>Data + untrusted content + comms.</a:t>
-            </a:r>
-            <a:endParaRPr lang="en-US" sz="900" dirty="0"/>
-          </a:p>
-        </p:txBody>
-      </p:sp>
-      <p:sp>
-        <p:nvSpPr>
-          <p:cNvPr id="39" name="Shape 37"/>
-          <p:cNvSpPr/>
-          <p:nvPr/>
-        </p:nvSpPr>
-        <p:spPr>
-          <a:xfrm>
-            <a:off x="4617720" y="3383280"/>
-            <a:ext cx="4297680" cy="713232"/>
-          </a:xfrm>
-          <a:prstGeom prst="rect">
-            <a:avLst/>
-          </a:prstGeom>
-          <a:solidFill>
-            <a:srgbClr val="0E0E14"/>
-          </a:solidFill>
-          <a:ln w="12700">
-            <a:solidFill>
-              <a:srgbClr val="FFE500"/>
-            </a:solidFill>
-            <a:prstDash val="solid"/>
-          </a:ln>
-        </p:spPr>
-        <p:txBody>
-          <a:bodyPr/>
-          <a:lstStyle/>
-          <a:p>
-            <a:endParaRPr lang="en-US"/>
-          </a:p>
-        </p:txBody>
-      </p:sp>
-      <p:sp>
-        <p:nvSpPr>
-          <p:cNvPr id="40" name="Shape 38"/>
-          <p:cNvSpPr/>
-          <p:nvPr/>
-        </p:nvSpPr>
-        <p:spPr>
-          <a:xfrm>
-            <a:off x="4617720" y="3383280"/>
-            <a:ext cx="73152" cy="713232"/>
-          </a:xfrm>
-          <a:prstGeom prst="rect">
-            <a:avLst/>
-          </a:prstGeom>
-          <a:solidFill>
-            <a:srgbClr val="FFE500"/>
-          </a:solidFill>
-          <a:ln w="12700">
-            <a:solidFill>
-              <a:srgbClr val="333333"/>
-            </a:solidFill>
-            <a:prstDash val="solid"/>
-          </a:ln>
-        </p:spPr>
-        <p:txBody>
-          <a:bodyPr/>
-          <a:lstStyle/>
-          <a:p>
-            <a:endParaRPr lang="en-US"/>
-          </a:p>
-        </p:txBody>
-      </p:sp>
-      <p:sp>
-        <p:nvSpPr>
-          <p:cNvPr id="41" name="Text 39"/>
-          <p:cNvSpPr/>
-          <p:nvPr/>
-        </p:nvSpPr>
-        <p:spPr>
-          <a:xfrm>
-            <a:off x="4782312" y="3429000"/>
-            <a:ext cx="4069080" cy="292608"/>
-          </a:xfrm>
-          <a:prstGeom prst="rect">
-            <a:avLst/>
-          </a:prstGeom>
-          <a:noFill/>
-          <a:ln/>
-        </p:spPr>
-        <p:txBody>
-          <a:bodyPr wrap="square" lIns="0" tIns="0" rIns="0" bIns="0" rtlCol="0" anchor="ctr"/>
-          <a:lstStyle/>
-          <a:p>
-            <a:pPr marL="0" indent="0">
-              <a:buNone/>
-            </a:pPr>
-            <a:r>
-              <a:rPr lang="en-US" sz="1100" b="1" dirty="0">
-                <a:solidFill>
-                  <a:srgbClr val="FFE500"/>
-                </a:solidFill>
-                <a:latin typeface="Courier New" pitchFamily="34" charset="0"/>
-                <a:ea typeface="Courier New" pitchFamily="34" charset="-122"/>
-                <a:cs typeface="Courier New" pitchFamily="34" charset="-120"/>
-              </a:rPr>
-              <a:t>RSP / PREPAREDNESS / FSP</a:t>
-            </a:r>
-            <a:endParaRPr lang="en-US" sz="1100" dirty="0"/>
-          </a:p>
-        </p:txBody>
-      </p:sp>
-      <p:sp>
-        <p:nvSpPr>
-          <p:cNvPr id="42" name="Text 40"/>
-          <p:cNvSpPr/>
-          <p:nvPr/>
-        </p:nvSpPr>
-        <p:spPr>
-          <a:xfrm>
-            <a:off x="4782312" y="3712464"/>
-            <a:ext cx="4069080" cy="329184"/>
-          </a:xfrm>
-          <a:prstGeom prst="rect">
-            <a:avLst/>
-          </a:prstGeom>
-          <a:noFill/>
-          <a:ln/>
-        </p:spPr>
-        <p:txBody>
-          <a:bodyPr wrap="square" lIns="0" tIns="0" rIns="0" bIns="0" rtlCol="0" anchor="ctr"/>
-          <a:lstStyle/>
-          <a:p>
-            <a:pPr marL="0" indent="0">
-              <a:buNone/>
-            </a:pPr>
-            <a:r>
-              <a:rPr lang="en-US" sz="900" dirty="0">
-                <a:solidFill>
-                  <a:srgbClr val="E8E8FF"/>
-                </a:solidFill>
-                <a:latin typeface="Courier New" pitchFamily="34" charset="0"/>
-                <a:ea typeface="Courier New" pitchFamily="34" charset="-122"/>
-                <a:cs typeface="Courier New" pitchFamily="34" charset="-120"/>
-              </a:rPr>
-              <a:t>Lab capability frameworks.</a:t>
-            </a:r>
-            <a:endParaRPr lang="en-US" sz="900" dirty="0"/>
-          </a:p>
-        </p:txBody>
-      </p:sp>
-    </p:spTree>
-  </p:cSld>
-  <p:clrMapOvr>
-    <a:masterClrMapping/>
-  </p:clrMapOvr>
-</p:sld>
-</file>
-
 <file path=ppt/slides/slide3.xml><?xml version="1.0" encoding="utf-8"?>
 <p:sld xmlns:a="http://schemas.openxmlformats.org/drawingml/2006/main" xmlns:r="http://schemas.openxmlformats.org/officeDocument/2006/relationships" xmlns:p="http://schemas.openxmlformats.org/presentationml/2006/main">
   <p:cSld name="Slide 3">
@@ -48755,7 +47177,7 @@
                 <a:ea typeface="Courier New" pitchFamily="34" charset="-122"/>
                 <a:cs typeface="Courier New" pitchFamily="34" charset="-120"/>
               </a:rPr>
-              <a:t>Kubernetes, infrastructure operations.</a:t>
+              <a:t>Kubernetes, infrastructure operations, cloud</a:t>
             </a:r>
             <a:endParaRPr lang="en-US" sz="1300" dirty="0"/>
           </a:p>
